--- a/decks/hist-tudors/hist-tudors_ch4_mary.pptx
+++ b/decks/hist-tudors/hist-tudors_ch4_mary.pptx
@@ -124,37 +124,37 @@
   <p:extLst>
     <p:ext uri="{521415D9-36F7-43E2-AB2F-B90AF26B5E84}">
       <p14:sectionLst xmlns:p14="http://schemas.microsoft.com/office/powerpoint/2010/main">
-        <p14:section name="Opening" id="{2d2f27ce-f02f-6fa1-53cf-2a3e5f51d7e1}">
+        <p14:section name="Opening" id="{38545ca0-3cd7-1e4b-0910-b037187b6a68}">
           <p14:sldIdLst>
             <p14:sldId id="256"/>
           </p14:sldIdLst>
         </p14:section>
-        <p14:section name="Gate" id="{2e7df116-0586-2bf8-5f64-4285ee55f680}">
+        <p14:section name="Gate" id="{5feb8dde-d55f-af34-1f4c-51c28227eb27}">
           <p14:sldIdLst>
             <p14:sldId id="257"/>
             <p14:sldId id="258"/>
           </p14:sldIdLst>
         </p14:section>
-        <p14:section name="Pre-teach" id="{7c514d6c-c8fe-8198-cb2f-ca04d156e6d0}">
+        <p14:section name="Pre-teach" id="{3db41044-0932-5de2-e0c1-1bc2016fe056}">
           <p14:sldIdLst>
             <p14:sldId id="259"/>
             <p14:sldId id="260"/>
           </p14:sldIdLst>
         </p14:section>
-        <p14:section name="Read-along" id="{8846931b-af7e-5fef-c170-bf1dc4b2ff77}">
+        <p14:section name="Read-along" id="{7407110a-86e0-b710-8eef-856e8667d95a}">
           <p14:sldIdLst>
             <p14:sldId id="261"/>
             <p14:sldId id="262"/>
           </p14:sldIdLst>
         </p14:section>
-        <p14:section name="Teach" id="{d9451d7e-70fa-27f5-e668-7f60598d4cf7}">
+        <p14:section name="Teach" id="{0f5b90e2-2c37-5abd-947b-b81598b9674f}">
           <p14:sldIdLst>
             <p14:sldId id="263"/>
             <p14:sldId id="264"/>
             <p14:sldId id="265"/>
           </p14:sldIdLst>
         </p14:section>
-        <p14:section name="Routes" id="{eb83d77c-f971-7277-d76b-0c5ed02a7b06}">
+        <p14:section name="Routes" id="{a642abd7-18f7-7394-812e-30186eb41b59}">
           <p14:sldIdLst>
             <p14:sldId id="266"/>
             <p14:sldId id="267"/>
@@ -162,12 +162,12 @@
             <p14:sldId id="269"/>
           </p14:sldIdLst>
         </p14:section>
-        <p14:section name="Close" id="{92833567-0623-0317-ac5e-d065c4f43c06}">
+        <p14:section name="Close" id="{0037de51-1116-e235-e256-15c959719d72}">
           <p14:sldIdLst>
             <p14:sldId id="270"/>
           </p14:sldIdLst>
         </p14:section>
-        <p14:section name="Answers" id="{b691e1f6-6f6d-949d-aff4-a97da142c4e1}">
+        <p14:section name="Answers" id="{5b6313cc-2db4-cd99-2d1c-b6a85f55315a}">
           <p14:sldIdLst>
             <p14:sldId id="271"/>
             <p14:sldId id="272"/>
@@ -2069,7 +2069,7 @@
             <a:r>
               <a:rPr lang="en-US" dirty="0"/>
               <a:t>Teach — A troubled early life and a race for the crown. Say it in your own words, then check understanding with a quick question: ask a pupil from the pre-teach group first, since they met these words and ideas before the lesson. Pupils try to recall before you re-explain.
-Mary was the daughter of Henry VIII and his first wife, Catherine of Aragon. When Henry ended that marriage, Mary lost her title of Princess and was separated from her mother. She stayed a committed Catholic all her life, and she pleaded with her brother Edward not to make his Protestant changes. Her father had disowned her when he split from Rome.
+Henry VIII was Mary's father, and her mother was his first wife, Catherine of Aragon. When Henry ended that marriage, Mary lost her title of Princess and was separated from her mother. She stayed a committed Catholic all her life, and she pleaded with her brother Edward not to make his Protestant changes. Her father had disowned her when he split from Rome.
 In 1553 Edward lay dying, aged 15, with no children. He and his advisers feared Mary would reverse his Protestant reforms, so he named his cousin Lady Jane Grey, a committed Protestant, as the next queen. The Duke of Northumberland backed the plan for his own reasons: Jane was married to his son, so his family would become the most powerful in England.
 In July 1553 Jane was taken to Syon House and told she was queen. Nobody had warned her or prepared her, and she broke down in tears. Within days her support melted away. Mary gathered her own supporters, rode into London almost unopposed, and was declared Queen Mary I.
 Tip: Your lesson asks which factor mattered most in making Mary queen: Edward's death, Jane's failure, Mary's support from the people, or Mary's own determination. Have a reason ready for your choice.</a:t>
@@ -14646,7 +14646,7 @@
                 <a:ea typeface="Calibri" pitchFamily="34" charset="-122"/>
                 <a:cs typeface="Calibri" pitchFamily="34" charset="-120"/>
               </a:rPr>
-              <a:t>Mary was the daughter of Henry VIII and his first wife, Catherine of Aragon.</a:t>
+              <a:t>Henry VIII was Mary's father, and her mother was his first wife, Catherine of Aragon.</a:t>
             </a:r>
             <a:endParaRPr lang="en-US" sz="2400" dirty="0"/>
           </a:p>
